--- a/assets/Reflexiones.pptx
+++ b/assets/Reflexiones.pptx
@@ -5751,7 +5751,7 @@
                 <a:cs typeface="Body Grotesque Fit"/>
                 <a:sym typeface="Body Grotesque Fit"/>
               </a:rPr>
-              <a:t>El modelo pueda hablar en varios idiomas segun el idioma del cliente</a:t>
+              <a:t>Mejorar la calidad de voz del asistente, ya que asterisk la baja bastante</a:t>
             </a:r>
           </a:p>
         </p:txBody>
